--- a/assets/pptx/catalog-572.pptx
+++ b/assets/pptx/catalog-572.pptx
@@ -5494,7 +5494,7 @@
                 <a:ea typeface="Ebrima"/>
                 <a:cs typeface="Ebrima"/>
               </a:rPr>
-              <a:t>ሌላ ጌታ አላውቅም (2x)</a:t>
+              <a:t>ሌላ ጌታ አላውቅም 2x</a:t>
             </a:r>
           </a:p>
         </p:txBody>
@@ -5628,7 +5628,7 @@
                 <a:ea typeface="Ebrima"/>
                 <a:cs typeface="Ebrima"/>
               </a:rPr>
-              <a:t>ሌላ አምላክ አላውቅም (2x)</a:t>
+              <a:t>ሌላ አምላክ አላውቅም 2x</a:t>
             </a:r>
           </a:p>
         </p:txBody>
@@ -5762,7 +5762,7 @@
                 <a:ea typeface="Ebrima"/>
                 <a:cs typeface="Ebrima"/>
               </a:rPr>
-              <a:t>ሌላ ንጉስ አላውቅም (2x)</a:t>
+              <a:t>ሌላ ንጉስ አላውቅም 2x</a:t>
             </a:r>
           </a:p>
         </p:txBody>
